--- a/public/fun/pack/pptx/talkpro/발표템플릿프리미엄_19_모임·동호회소개_레몬크림.pptx
+++ b/public/fun/pack/pptx/talkpro/발표템플릿프리미엄_19_모임·동호회소개_레몬크림.pptx
@@ -115,12 +115,12 @@
   <p:extLst>
     <p:ext uri="{521415D9-36F7-43E2-AB2F-B90AF26B5E84}">
       <p14:sectionLst xmlns:p14="http://schemas.microsoft.com/office/powerpoint/2010/main">
-        <p14:section name="시작" id="{6B90FA4C-77E4-43BE-9226-9A54701B5E9D}">
+        <p14:section name="시작" id="{FBEE984B-0349-4EEF-BC3E-0E00A7AA31E7}">
           <p14:sldIdLst>
             <p14:sldId id="256"/>
           </p14:sldIdLst>
         </p14:section>
-        <p14:section name="본문" id="{57D944A8-2C26-4D23-B741-343375435FFE}">
+        <p14:section name="본문" id="{B4444854-CBA5-40FF-9F39-0747D8FFCF5B}">
           <p14:sldIdLst>
             <p14:sldId id="257"/>
             <p14:sldId id="258"/>
@@ -131,7 +131,7 @@
             <p14:sldId id="263"/>
           </p14:sldIdLst>
         </p14:section>
-        <p14:section name="마무리" id="{533106BA-60B7-41F6-895D-37A98E9A081A}">
+        <p14:section name="마무리" id="{84225F11-BFC7-440E-9936-396DFE1D0F84}">
           <p14:sldIdLst>
             <p14:sldId id="264"/>
           </p14:sldIdLst>
@@ -1891,7 +1891,7 @@
             </a:lvl1pPr>
           </a:lstStyle>
           <a:p>
-            <a:fld id="{1D98C2CA-935F-445E-9ABB-8991517C89C5}" type="slidenum">
+            <a:fld id="{6236AE51-1615-4ECB-A860-20E5183FE458}" type="slidenum">
               <a:rPr lang="en-US"/>
               <a:t>‹#›</a:t>
             </a:fld>
@@ -2620,7 +2620,7 @@
             </a:lvl1pPr>
           </a:lstStyle>
           <a:p>
-            <a:fld id="{566954E0-22E9-46FA-81BC-7B2AABF86CFE}" type="slidenum">
+            <a:fld id="{54FBEA29-F30C-42E2-A033-A756907F885E}" type="slidenum">
               <a:rPr lang="en-US"/>
               <a:t>‹#›</a:t>
             </a:fld>
@@ -3369,7 +3369,7 @@
             </a:lvl1pPr>
           </a:lstStyle>
           <a:p>
-            <a:fld id="{3B6F09A9-5599-43B2-BE7D-CCBAFF702697}" type="slidenum">
+            <a:fld id="{CBB8B2F2-781B-4FA5-A23F-131DA15A11BF}" type="slidenum">
               <a:rPr lang="en-US"/>
               <a:t>‹#›</a:t>
             </a:fld>
@@ -4232,7 +4232,7 @@
           <a:p>
             <a:r>
               <a:rPr lang="ko-KR"/>
-              <a:t>한 달에 한 번, 이렇게 모입니다</a:t>
+              <a:t>정해진 날마다 이렇게 모입니다</a:t>
             </a:r>
           </a:p>
         </p:txBody>
@@ -4260,7 +4260,7 @@
           <a:p>
             <a:r>
               <a:rPr lang="ko-KR"/>
-              <a:t>0000. 00. 00</a:t>
+              <a:t>날짜 입력</a:t>
             </a:r>
           </a:p>
         </p:txBody>
@@ -4367,7 +4367,7 @@
           <a:bodyPr/>
           <a:lstStyle/>
           <a:p>
-            <a:fld id="{77430ED4-FC8F-4440-B5F9-4424A7FD59D6}" type="slidenum">
+            <a:fld id="{123CD48F-B367-4646-BEE6-B45CE8F8689B}" type="slidenum">
               <a:rPr lang="en-US"/>
               <a:t>‹#›</a:t>
             </a:fld>
@@ -5655,7 +5655,7 @@
           <a:bodyPr/>
           <a:lstStyle/>
           <a:p>
-            <a:fld id="{AF1515DF-912D-425D-BAB0-257B68843258}" type="slidenum">
+            <a:fld id="{0071836D-9673-4DFB-89BE-A607B184529F}" type="slidenum">
               <a:rPr lang="en-US"/>
               <a:t>‹#›</a:t>
             </a:fld>
@@ -5765,7 +5765,7 @@
           <a:bodyPr/>
           <a:lstStyle/>
           <a:p>
-            <a:fld id="{6A7CA64C-1C02-4B8C-99AE-ED66622044CF}" type="slidenum">
+            <a:fld id="{72B366DD-0DF4-406C-96D6-FA00DACD5C17}" type="slidenum">
               <a:rPr lang="en-US"/>
               <a:t>‹#›</a:t>
             </a:fld>
@@ -6808,7 +6808,7 @@
           <a:bodyPr/>
           <a:lstStyle/>
           <a:p>
-            <a:fld id="{D21FC99E-F529-4F24-8209-7C6049EDBD5C}" type="slidenum">
+            <a:fld id="{78876092-E63A-431D-8D8E-450ACDAC831D}" type="slidenum">
               <a:rPr lang="en-US"/>
               <a:t>‹#›</a:t>
             </a:fld>
@@ -7478,7 +7478,7 @@
           <a:bodyPr/>
           <a:lstStyle/>
           <a:p>
-            <a:fld id="{4DD28FBF-5194-4645-8DFB-11B6CDE6F6C1}" type="slidenum">
+            <a:fld id="{6462BD4C-8E0F-44C0-B16A-A39004C72990}" type="slidenum">
               <a:rPr lang="en-US"/>
               <a:t>‹#›</a:t>
             </a:fld>
@@ -7683,7 +7683,7 @@
           <a:bodyPr/>
           <a:lstStyle/>
           <a:p>
-            <a:fld id="{E8781953-83BB-4858-8194-318DF356CE56}" type="slidenum">
+            <a:fld id="{9443FAD4-7509-4E06-80D7-D1BBC3C4A937}" type="slidenum">
               <a:rPr lang="en-US"/>
               <a:t>‹#›</a:t>
             </a:fld>
@@ -8769,7 +8769,7 @@
           <a:bodyPr/>
           <a:lstStyle/>
           <a:p>
-            <a:fld id="{EE83A75A-32FC-473A-9FCA-2B5BD759A66C}" type="slidenum">
+            <a:fld id="{9AA2EEFD-A27F-4F32-9AA8-A87036877255}" type="slidenum">
               <a:rPr lang="en-US"/>
               <a:t>‹#›</a:t>
             </a:fld>
